--- a/paper_drafts/figures/论文流程图汇总.pptx
+++ b/paper_drafts/figures/论文流程图汇总.pptx
@@ -107,6 +107,11 @@
       </a:defRPr>
     </a:lvl9pPr>
   </p:defaultTextStyle>
+  <p:extLst>
+    <p:ext uri="{EFAFB233-063F-42B5-8137-9DF3F51BA10A}">
+      <p15:sldGuideLst xmlns:p15="http://schemas.microsoft.com/office/powerpoint/2012/main"/>
+    </p:ext>
+  </p:extLst>
 </p:presentation>
 </file>
 
@@ -325,7 +330,7 @@
           <a:bodyPr/>
           <a:lstStyle/>
           <a:p>
-            <a:endParaRPr/>
+            <a:endParaRPr dirty="0"/>
           </a:p>
         </p:txBody>
       </p:sp>
@@ -716,10 +721,10 @@
       </p:grpSpPr>
       <p:grpSp>
         <p:nvGrpSpPr>
-          <p:cNvPr id="35" name="组合 34">
+          <p:cNvPr id="4" name="组合 3">
             <a:extLst>
               <a:ext uri="{FF2B5EF4-FFF2-40B4-BE49-F238E27FC236}">
-                <a16:creationId xmlns:a16="http://schemas.microsoft.com/office/drawing/2014/main" id="{545CB75C-E51B-4B05-09AB-EF1578CB63D5}"/>
+                <a16:creationId xmlns:a16="http://schemas.microsoft.com/office/drawing/2014/main" id="{0C3DB207-7987-E8AD-6975-E9ABD2CFA257}"/>
               </a:ext>
             </a:extLst>
           </p:cNvPr>
@@ -728,84 +733,12 @@
         </p:nvGrpSpPr>
         <p:grpSpPr>
           <a:xfrm>
-            <a:off x="709347" y="481921"/>
-            <a:ext cx="1368477" cy="1101090"/>
-            <a:chOff x="709347" y="481921"/>
-            <a:chExt cx="1368477" cy="1101090"/>
+            <a:off x="490096" y="668611"/>
+            <a:ext cx="1630506" cy="914400"/>
+            <a:chOff x="351294" y="668611"/>
+            <a:chExt cx="1630506" cy="914400"/>
           </a:xfrm>
         </p:grpSpPr>
-        <p:pic>
-          <p:nvPicPr>
-            <p:cNvPr id="30" name="图形 29" descr="男人 纯色填充">
-              <a:extLst>
-                <a:ext uri="{FF2B5EF4-FFF2-40B4-BE49-F238E27FC236}">
-                  <a16:creationId xmlns:a16="http://schemas.microsoft.com/office/drawing/2014/main" id="{04B3EBC2-40BB-B2D7-E720-8DCB745A015B}"/>
-                </a:ext>
-              </a:extLst>
-            </p:cNvPr>
-            <p:cNvPicPr>
-              <a:picLocks noChangeAspect="1"/>
-            </p:cNvPicPr>
-            <p:nvPr/>
-          </p:nvPicPr>
-          <p:blipFill>
-            <a:blip>
-              <a:extLst>
-                <a:ext uri="{96DAC541-7B7A-43D3-8B79-37D633B846F1}">
-                  <asvg:svgBlip xmlns:asvg="http://schemas.microsoft.com/office/drawing/2016/SVG/main" r:embed="rId3"/>
-                </a:ext>
-              </a:extLst>
-            </a:blip>
-            <a:stretch>
-              <a:fillRect/>
-            </a:stretch>
-          </p:blipFill>
-          <p:spPr>
-            <a:xfrm>
-              <a:off x="1050686" y="481921"/>
-              <a:ext cx="914400" cy="914400"/>
-            </a:xfrm>
-            <a:prstGeom prst="rect">
-              <a:avLst/>
-            </a:prstGeom>
-          </p:spPr>
-        </p:pic>
-        <p:pic>
-          <p:nvPicPr>
-            <p:cNvPr id="28" name="图形 27" descr="男人 纯色填充">
-              <a:extLst>
-                <a:ext uri="{FF2B5EF4-FFF2-40B4-BE49-F238E27FC236}">
-                  <a16:creationId xmlns:a16="http://schemas.microsoft.com/office/drawing/2014/main" id="{7E671D79-20FE-870D-D148-BA8B8F824295}"/>
-                </a:ext>
-              </a:extLst>
-            </p:cNvPr>
-            <p:cNvPicPr>
-              <a:picLocks noChangeAspect="1"/>
-            </p:cNvPicPr>
-            <p:nvPr/>
-          </p:nvPicPr>
-          <p:blipFill>
-            <a:blip>
-              <a:extLst>
-                <a:ext uri="{96DAC541-7B7A-43D3-8B79-37D633B846F1}">
-                  <asvg:svgBlip xmlns:asvg="http://schemas.microsoft.com/office/drawing/2016/SVG/main" r:embed="rId3"/>
-                </a:ext>
-              </a:extLst>
-            </a:blip>
-            <a:stretch>
-              <a:fillRect/>
-            </a:stretch>
-          </p:blipFill>
-          <p:spPr>
-            <a:xfrm>
-              <a:off x="822086" y="481921"/>
-              <a:ext cx="914400" cy="914400"/>
-            </a:xfrm>
-            <a:prstGeom prst="rect">
-              <a:avLst/>
-            </a:prstGeom>
-          </p:spPr>
-        </p:pic>
         <p:pic>
           <p:nvPicPr>
             <p:cNvPr id="20" name="图形 19" descr="男人 纯色填充">
@@ -870,7 +803,7 @@
           </p:blipFill>
           <p:spPr>
             <a:xfrm>
-              <a:off x="937947" y="668611"/>
+              <a:off x="351294" y="668611"/>
               <a:ext cx="914400" cy="914400"/>
             </a:xfrm>
             <a:prstGeom prst="rect">
@@ -906,7 +839,7 @@
           </p:blipFill>
           <p:spPr>
             <a:xfrm>
-              <a:off x="1163424" y="668611"/>
+              <a:off x="1067400" y="668611"/>
               <a:ext cx="914400" cy="914400"/>
             </a:xfrm>
             <a:prstGeom prst="rect">
@@ -1069,7 +1002,7 @@
         </p:nvSpPr>
         <p:spPr>
           <a:xfrm>
-            <a:off x="643703" y="2802211"/>
+            <a:off x="2368742" y="3126467"/>
             <a:ext cx="1434121" cy="859106"/>
           </a:xfrm>
           <a:prstGeom prst="rect">
@@ -1103,26 +1036,6 @@
         <p:txBody>
           <a:bodyPr rtlCol="0" anchor="ctr"/>
           <a:lstStyle/>
-          <a:p>
-            <a:pPr algn="ctr"/>
-            <a:r>
-              <a:rPr lang="zh-CN" altLang="en-US" sz="1600" dirty="0">
-                <a:solidFill>
-                  <a:schemeClr val="tx1"/>
-                </a:solidFill>
-                <a:latin typeface="Times New Roman" panose="02020603050405020304" pitchFamily="18" charset="0"/>
-                <a:ea typeface="宋体" panose="02010600030101010101" pitchFamily="2" charset="-122"/>
-              </a:rPr>
-              <a:t>动作生成网络</a:t>
-            </a:r>
-            <a:endParaRPr lang="en-US" altLang="zh-CN" sz="1600" dirty="0">
-              <a:solidFill>
-                <a:schemeClr val="tx1"/>
-              </a:solidFill>
-              <a:latin typeface="Times New Roman" panose="02020603050405020304" pitchFamily="18" charset="0"/>
-              <a:ea typeface="宋体" panose="02010600030101010101" pitchFamily="2" charset="-122"/>
-            </a:endParaRPr>
-          </a:p>
           <a:p>
             <a:pPr algn="ctr"/>
             <a:r>
